--- a/It Is Well.pptx
+++ b/It Is Well.pptx
@@ -255,7 +255,7 @@
           <a:p>
             <a:fld id="{E759A0DE-F190-5444-87AC-4719D5F20D15}" type="datetimeFigureOut">
               <a:rPr lang="en-US" smtClean="0"/>
-              <a:t>6/6/26</a:t>
+              <a:t>8/1/26</a:t>
             </a:fld>
             <a:endParaRPr lang="en-US"/>
           </a:p>
@@ -425,7 +425,7 @@
           <a:p>
             <a:fld id="{E759A0DE-F190-5444-87AC-4719D5F20D15}" type="datetimeFigureOut">
               <a:rPr lang="en-US" smtClean="0"/>
-              <a:t>6/6/26</a:t>
+              <a:t>8/1/26</a:t>
             </a:fld>
             <a:endParaRPr lang="en-US"/>
           </a:p>
@@ -605,7 +605,7 @@
           <a:p>
             <a:fld id="{E759A0DE-F190-5444-87AC-4719D5F20D15}" type="datetimeFigureOut">
               <a:rPr lang="en-US" smtClean="0"/>
-              <a:t>6/6/26</a:t>
+              <a:t>8/1/26</a:t>
             </a:fld>
             <a:endParaRPr lang="en-US"/>
           </a:p>
@@ -775,7 +775,7 @@
           <a:p>
             <a:fld id="{E759A0DE-F190-5444-87AC-4719D5F20D15}" type="datetimeFigureOut">
               <a:rPr lang="en-US" smtClean="0"/>
-              <a:t>6/6/26</a:t>
+              <a:t>8/1/26</a:t>
             </a:fld>
             <a:endParaRPr lang="en-US"/>
           </a:p>
@@ -1021,7 +1021,7 @@
           <a:p>
             <a:fld id="{E759A0DE-F190-5444-87AC-4719D5F20D15}" type="datetimeFigureOut">
               <a:rPr lang="en-US" smtClean="0"/>
-              <a:t>6/6/26</a:t>
+              <a:t>8/1/26</a:t>
             </a:fld>
             <a:endParaRPr lang="en-US"/>
           </a:p>
@@ -1253,7 +1253,7 @@
           <a:p>
             <a:fld id="{E759A0DE-F190-5444-87AC-4719D5F20D15}" type="datetimeFigureOut">
               <a:rPr lang="en-US" smtClean="0"/>
-              <a:t>6/6/26</a:t>
+              <a:t>8/1/26</a:t>
             </a:fld>
             <a:endParaRPr lang="en-US"/>
           </a:p>
@@ -1620,7 +1620,7 @@
           <a:p>
             <a:fld id="{E759A0DE-F190-5444-87AC-4719D5F20D15}" type="datetimeFigureOut">
               <a:rPr lang="en-US" smtClean="0"/>
-              <a:t>6/6/26</a:t>
+              <a:t>8/1/26</a:t>
             </a:fld>
             <a:endParaRPr lang="en-US"/>
           </a:p>
@@ -1738,7 +1738,7 @@
           <a:p>
             <a:fld id="{E759A0DE-F190-5444-87AC-4719D5F20D15}" type="datetimeFigureOut">
               <a:rPr lang="en-US" smtClean="0"/>
-              <a:t>6/6/26</a:t>
+              <a:t>8/1/26</a:t>
             </a:fld>
             <a:endParaRPr lang="en-US"/>
           </a:p>
@@ -1833,7 +1833,7 @@
           <a:p>
             <a:fld id="{E759A0DE-F190-5444-87AC-4719D5F20D15}" type="datetimeFigureOut">
               <a:rPr lang="en-US" smtClean="0"/>
-              <a:t>6/6/26</a:t>
+              <a:t>8/1/26</a:t>
             </a:fld>
             <a:endParaRPr lang="en-US"/>
           </a:p>
@@ -2110,7 +2110,7 @@
           <a:p>
             <a:fld id="{E759A0DE-F190-5444-87AC-4719D5F20D15}" type="datetimeFigureOut">
               <a:rPr lang="en-US" smtClean="0"/>
-              <a:t>6/6/26</a:t>
+              <a:t>8/1/26</a:t>
             </a:fld>
             <a:endParaRPr lang="en-US"/>
           </a:p>
@@ -2367,7 +2367,7 @@
           <a:p>
             <a:fld id="{E759A0DE-F190-5444-87AC-4719D5F20D15}" type="datetimeFigureOut">
               <a:rPr lang="en-US" smtClean="0"/>
-              <a:t>6/6/26</a:t>
+              <a:t>8/1/26</a:t>
             </a:fld>
             <a:endParaRPr lang="en-US"/>
           </a:p>
@@ -2580,7 +2580,7 @@
           <a:p>
             <a:fld id="{E759A0DE-F190-5444-87AC-4719D5F20D15}" type="datetimeFigureOut">
               <a:rPr lang="en-US" smtClean="0"/>
-              <a:t>6/6/26</a:t>
+              <a:t>8/1/26</a:t>
             </a:fld>
             <a:endParaRPr lang="en-US"/>
           </a:p>
@@ -3041,6 +3041,79 @@
           </a:p>
         </p:txBody>
       </p:sp>
+      <p:sp>
+        <p:nvSpPr>
+          <p:cNvPr id="7" name="TextBox 6">
+            <a:extLst>
+              <a:ext uri="{FF2B5EF4-FFF2-40B4-BE49-F238E27FC236}">
+                <a16:creationId xmlns:a16="http://schemas.microsoft.com/office/drawing/2014/main" id="{CFE750F7-3AE0-6F22-FBB9-4E47E95A492E}"/>
+              </a:ext>
+            </a:extLst>
+          </p:cNvPr>
+          <p:cNvSpPr txBox="1"/>
+          <p:nvPr/>
+        </p:nvSpPr>
+        <p:spPr>
+          <a:xfrm>
+            <a:off x="168442" y="5444311"/>
+            <a:ext cx="8807115" cy="1200329"/>
+          </a:xfrm>
+          <a:prstGeom prst="rect">
+            <a:avLst/>
+          </a:prstGeom>
+          <a:noFill/>
+        </p:spPr>
+        <p:txBody>
+          <a:bodyPr wrap="square" rtlCol="0">
+            <a:spAutoFit/>
+          </a:bodyPr>
+          <a:lstStyle/>
+          <a:p>
+            <a:pPr algn="ctr"/>
+            <a:r>
+              <a:rPr lang="en-US" dirty="0">
+                <a:solidFill>
+                  <a:schemeClr val="bg1"/>
+                </a:solidFill>
+              </a:rPr>
+              <a:t>Words by Horatio G. Spafford (1873) </a:t>
+            </a:r>
+          </a:p>
+          <a:p>
+            <a:pPr algn="ctr"/>
+            <a:r>
+              <a:rPr lang="en-US" dirty="0">
+                <a:solidFill>
+                  <a:schemeClr val="bg1"/>
+                </a:solidFill>
+              </a:rPr>
+              <a:t>Music by by Philip P. Bliss (1876)</a:t>
+            </a:r>
+          </a:p>
+          <a:p>
+            <a:pPr algn="ctr"/>
+            <a:r>
+              <a:rPr lang="en-US" dirty="0">
+                <a:solidFill>
+                  <a:schemeClr val="bg1"/>
+                </a:solidFill>
+              </a:rPr>
+              <a:t>Public Domain</a:t>
+            </a:r>
+          </a:p>
+          <a:p>
+            <a:pPr algn="ctr"/>
+            <a:r>
+              <a:rPr lang="en-US" dirty="0">
+                <a:solidFill>
+                  <a:schemeClr val="bg1"/>
+                </a:solidFill>
+              </a:rPr>
+              <a:t>CCLI License #137776</a:t>
+            </a:r>
+          </a:p>
+        </p:txBody>
+      </p:sp>
     </p:spTree>
     <p:extLst>
       <p:ext uri="{BB962C8B-B14F-4D97-AF65-F5344CB8AC3E}">
@@ -3521,53 +3594,6 @@
                 <a:ea typeface="Bodoni Ornaments" pitchFamily="2" charset="0"/>
               </a:rPr>
               <a:t>with my soul</a:t>
-            </a:r>
-          </a:p>
-        </p:txBody>
-      </p:sp>
-      <p:sp>
-        <p:nvSpPr>
-          <p:cNvPr id="2" name="TextBox 1">
-            <a:extLst>
-              <a:ext uri="{FF2B5EF4-FFF2-40B4-BE49-F238E27FC236}">
-                <a16:creationId xmlns:a16="http://schemas.microsoft.com/office/drawing/2014/main" id="{50261F0E-25B7-C0F3-2215-8DAAA47AF41D}"/>
-              </a:ext>
-            </a:extLst>
-          </p:cNvPr>
-          <p:cNvSpPr txBox="1"/>
-          <p:nvPr/>
-        </p:nvSpPr>
-        <p:spPr>
-          <a:xfrm>
-            <a:off x="7390614" y="6488668"/>
-            <a:ext cx="1753386" cy="369332"/>
-          </a:xfrm>
-          <a:prstGeom prst="rect">
-            <a:avLst/>
-          </a:prstGeom>
-          <a:noFill/>
-        </p:spPr>
-        <p:txBody>
-          <a:bodyPr wrap="square" rtlCol="0">
-            <a:spAutoFit/>
-          </a:bodyPr>
-          <a:lstStyle/>
-          <a:p>
-            <a:r>
-              <a:rPr lang="en-US">
-                <a:solidFill>
-                  <a:schemeClr val="bg1"/>
-                </a:solidFill>
-              </a:rPr>
-              <a:t>CCLI#</a:t>
-            </a:r>
-            <a:r>
-              <a:rPr lang="en-US" dirty="0">
-                <a:solidFill>
-                  <a:schemeClr val="bg1"/>
-                </a:solidFill>
-              </a:rPr>
-              <a:t>7102397</a:t>
             </a:r>
           </a:p>
         </p:txBody>
